--- a/Progression_P6/P6-L02_Paper_1_Listening.pptx
+++ b/Progression_P6/P6-L02_Paper_1_Listening.pptx
@@ -55250,7 +55250,7 @@
                 <a:ea typeface="Calibri" pitchFamily="34" charset="-122"/>
                 <a:cs typeface="Calibri" pitchFamily="34" charset="-120"/>
               </a:rPr>
-              <a:t>8 exam words from the website in 1 groups. </a:t>
+              <a:t>8 exam words from the website in one group. </a:t>
             </a:r>
             <a:endParaRPr lang="en-US" sz="1600" dirty="0"/>
           </a:p>

--- a/Progression_P6/P6-L02_Paper_1_Listening.pptx
+++ b/Progression_P6/P6-L02_Paper_1_Listening.pptx
@@ -525,7 +525,11 @@
           <a:lstStyle/>
           <a:p>
             <a:r>
-              <a:rPr lang="en-US" dirty="0"/>
+              <a:rPr lang="ar-SA" dirty="0">
+                <a:latin typeface="Amiri" pitchFamily="2" charset="-78"/>
+                <a:ea typeface="Amiri" pitchFamily="2" charset="-78"/>
+                <a:cs typeface="Amiri" pitchFamily="2" charset="-78"/>
+              </a:rPr>
               <a:t>LESSON AT A GLANCE — planned for 56 minutes, leaving about 4 minutes for Teams delays.
 0–1 Welcome · 1–2 Map · 2–8 Do Now + answers · 8–9 Objectives · 9–13 Strategy words · 13–17 The six strategies · 17–19 How Paper 1 is scored · 19–23 Annotate the questions (I Do) · 23–33 Text 1 · 33–40 Text 2 · 40–47 Text 3 · 47–51 Report what you heard · 51–55 Performance analysis · 55–58 Reflection + self-check · 58–60 Preparation.
 FLEX slides are optional. Use them if the class is moving quickly; otherwise the same activities are on the website for homework.
@@ -626,7 +630,11 @@
           <a:lstStyle/>
           <a:p>
             <a:r>
-              <a:rPr lang="en-US" dirty="0"/>
+              <a:rPr lang="ar-SA" dirty="0">
+                <a:latin typeface="Amiri" pitchFamily="2" charset="-78"/>
+                <a:ea typeface="Amiri" pitchFamily="2" charset="-78"/>
+                <a:cs typeface="Amiri" pitchFamily="2" charset="-78"/>
+              </a:rPr>
               <a:t>TEACH (4 min) — the website cards. Model strategy 2 on the board: write a label next to a sample question. Stress strategy 5: an unanswered question scores zero — make the best-supported guess.
 WEBSITE CARDS “The six listening strategies”: Read the questions first: Before the audio, read every question so you know what to listen for. · Annotate each question: Mark the type of information sought: a name, a number, an opinion, a conditional type, a tense. (اسْمٌ؟ رَقْمٌ؟ رَأْيٌ؟ نَوْعُ شَرْطٍ؟) · First listen for the gist: On the first hearing, answer only what you are confident about. · Second listen to verify: Use the second hearing to confirm, correct and complete — trust your first answer on plain facts. · Never leave a blank: An unanswered question scores zero; make your best-supported guess. · Listen for the grammar signal: A trigger, a conditional particle or صَحِيحٌ أَنَّ tells you the meaning that follows. (لِكَيْ · إِذَا · لَوْ · صَحِيحٌ أَنَّ · غَيْرَ أَنَّ)</a:t>
             </a:r>
@@ -892,7 +900,11 @@
           <a:lstStyle/>
           <a:p>
             <a:r>
-              <a:rPr lang="en-US" dirty="0"/>
+              <a:rPr lang="ar-SA" dirty="0">
+                <a:latin typeface="Amiri" pitchFamily="2" charset="-78"/>
+                <a:ea typeface="Amiri" pitchFamily="2" charset="-78"/>
+                <a:cs typeface="Amiri" pitchFamily="2" charset="-78"/>
+              </a:rPr>
               <a:t>TEXT 1 (website) — multiple choice, 8 marks. Two-minute gap: students read and label the questions (as in the I Do). Read the script twice. Core: questions 1–4. Develop / Stretch: all 8.
 TEACHER READS THE SCRIPT ALOUD TWICE. Students read the questions first (30 s).
 SCRIPT: يَقُولُ الخَبِيرُ: تُشِيرُ الدِّرَاسَاتُ إِلَى أَنَّ النَّوْمَ الجَيِّدَ أَسَاسُ الصِّحَّةِ. صَحِيحٌ أَنَّ الرِّيَاضَةَ مُهِمَّةٌ، غَيْرَ أَنَّ الرَّاحَةَ لَا تَقِلُّ أَهَمِّيَّةً عَنْهَا. إِذَا نَامَ الإِنْسَانُ سَبْعَ سَاعَاتٍ، سَيَتَحَسَّنُ تَرْكِيزُهُ. وَلَوْ قَلَّلْنَا مِنَ الشَّاشَاتِ لَيْلًا، لَنِمْنَا بِعُمْقٍ أَكْبَرَ. وَيَنْبَغِي أَنْ نَحْرِصَ عَلَى غِذَاءٍ مُتَوَازِنٍ. وَأَكَّدَ الخَبِيرُ أَنَّ التَّوَتُّرَ المُزْمِنَ يُضْعِفُ المَنَاعَةَ.</a:t>
@@ -1158,7 +1170,11 @@
           <a:lstStyle/>
           <a:p>
             <a:r>
-              <a:rPr lang="en-US" dirty="0"/>
+              <a:rPr lang="ar-SA" dirty="0">
+                <a:latin typeface="Amiri" pitchFamily="2" charset="-78"/>
+                <a:ea typeface="Amiri" pitchFamily="2" charset="-78"/>
+                <a:cs typeface="Amiri" pitchFamily="2" charset="-78"/>
+              </a:rPr>
               <a:t>TEXT 2 (website) — matching: who says it? 6 marks. Read the speaker names clearly (سَلْمَى · كَرِيمٌ) — consider a different voice for each. Core: questions 1–3. Develop / Stretch: all 6.
 TEACHER READS THE SCRIPT ALOUD TWICE. Students read the questions first (30 s).
 SCRIPT: سَلْمَى: أَرَى أَنَّ الدِّرَاسَةَ فِي الخَارِجِ تُوَسِّعُ الآفَاقَ. كَرِيمٌ: صَحِيحٌ أَنَّهَا مُكْلِفَةٌ، غَيْرَ أَنَّ العَائِدَ يَسْتَحِقُّ. سَلْمَى: وَلَوْ تَعَلَّمْتُ لُغَةً جَدِيدَةً، لَانْفَتَحَتْ أَمَامِي فُرَصٌ أَكْثَرُ. كَرِيمٌ: وَيَنْبَغِي أَنْ نُخَطِّطَ لِلْمِيزَانِيَّةِ مُبَكِّرًا. سَلْمَى: وَأَكَّدَ مُسْتَشَارِي أَنَّ المِنَحَ تُخَفِّفُ العِبْءَ. كَرِيمٌ: وَإِذَا حَصَلْتُ عَلَى مِنْحَةٍ، سَأُسَافِرُ العَامَ القَادِمَ.</a:t>
@@ -1424,7 +1440,11 @@
           <a:lstStyle/>
           <a:p>
             <a:r>
-              <a:rPr lang="en-US" dirty="0"/>
+              <a:rPr lang="ar-SA" dirty="0">
+                <a:latin typeface="Amiri" pitchFamily="2" charset="-78"/>
+                <a:ea typeface="Amiri" pitchFamily="2" charset="-78"/>
+                <a:cs typeface="Amiri" pitchFamily="2" charset="-78"/>
+              </a:rPr>
               <a:t>TEXT 3 (website) — select the statement the text supports, 6 marks. Warn about distractors: an option may use words from the text but change the meaning (e.g. “the parks were built to attract traffic”). Core: questions 1–3. Develop / Stretch: all 6. Question 6 asks about REGISTER — formal planning language (passives, triggers).
 TEACHER READS THE SCRIPT ALOUD TWICE. Students read the questions first (30 s).
 SCRIPT: يَقُولُ المُخَطِّطُ: كَانَتِ المَدِينَةُ قَدْ عَانَتْ مِنَ التَّلَوُّثِ لِسَنَوَاتٍ. وَاليَوْمَ يَتَطَلَّبُ الأَمْرُ أَنْ نَسْتَثْمِرَ فِي النَّقْلِ النَّظِيفِ. صُمِّمَتِ الحَدَائِقُ الجَدِيدَةُ لِكَيْ تُنَقِّيَ الهَوَاءَ. وَإِذَا اعْتَمَدْنَا عَلَى الطَّاقَةِ الشَّمْسِيَّةِ، سَتَنْخَفِضُ الانْبِعَاثَاتُ. وَيَرْجُو المُخَطِّطُ أَنْ تُصْبِحَ المَدِينَةُ نَمُوذَجًا يُحْتَذَى.</a:t>
@@ -1514,7 +1534,11 @@
           <a:lstStyle/>
           <a:p>
             <a:r>
-              <a:rPr lang="en-US" dirty="0"/>
+              <a:rPr lang="ar-SA" dirty="0">
+                <a:latin typeface="Amiri" pitchFamily="2" charset="-78"/>
+                <a:ea typeface="Amiri" pitchFamily="2" charset="-78"/>
+                <a:cs typeface="Amiri" pitchFamily="2" charset="-78"/>
+              </a:rPr>
               <a:t>WELCOME (1 min) — while students join.
 • Greet each student by name as they arrive: السَّلَامُ عَلَيْكُمْ. Take the register (Pastoral Tracker: attendance 0/1).
 • 2-MINUTE CHECK-IN (SEND training): a private chat to any student who seemed unsettled last lesson — “Are you okay today? 👍 / 👎”.
@@ -1783,7 +1807,11 @@
           <a:lstStyle/>
           <a:p>
             <a:r>
-              <a:rPr lang="en-US" dirty="0"/>
+              <a:rPr lang="ar-SA" dirty="0">
+                <a:latin typeface="Amiri" pitchFamily="2" charset="-78"/>
+                <a:ea typeface="Amiri" pitchFamily="2" charset="-78"/>
+                <a:cs typeface="Amiri" pitchFamily="2" charset="-78"/>
+              </a:rPr>
               <a:t>SPEAKING (4 min) — teacher-made: retell the three texts with reported speech (قَالَ إِنَّ · سَلَّمَ بِأَنَّ · رَدَّ بِأَنَّ). Note: قَالَ takes إِنَّ, other reporting verbs take أَنَّ (P3-L06). ● 10 s think → ↔ 45 s rehearse muted → ◎ two pairs on open mic.</a:t>
             </a:r>
             <a:endParaRPr lang="en-US" dirty="0"/>
@@ -2679,7 +2707,11 @@
           <a:lstStyle/>
           <a:p>
             <a:r>
-              <a:rPr lang="en-US" dirty="0"/>
+              <a:rPr lang="ar-SA" dirty="0">
+                <a:latin typeface="Amiri" pitchFamily="2" charset="-78"/>
+                <a:ea typeface="Amiri" pitchFamily="2" charset="-78"/>
+                <a:cs typeface="Amiri" pitchFamily="2" charset="-78"/>
+              </a:rPr>
               <a:t>KEY WORDS — HOW TO TEACH EACH GROUP (EAL pre-teaching routine, 7 min)
 1. HEAR IT: say the word twice, clearly, with a gesture where possible.
 2. SAY IT: choral repetition — “I say, you say” — then two volunteers.
@@ -2774,7 +2806,11 @@
           <a:lstStyle/>
           <a:p>
             <a:r>
-              <a:rPr lang="en-US" dirty="0"/>
+              <a:rPr lang="ar-SA" dirty="0">
+                <a:latin typeface="Amiri" pitchFamily="2" charset="-78"/>
+                <a:ea typeface="Amiri" pitchFamily="2" charset="-78"/>
+                <a:cs typeface="Amiri" pitchFamily="2" charset="-78"/>
+              </a:rPr>
               <a:t>KEY WORDS — Listening strategies (website vocabulary (1 of 2)). Hear → Say → See → Use. Transliteration is printed for Core students (cover it for Develop/Stretch).
 The strategy sequence in the words themselves: قِرَاءَةُ الأَسْئِلَةِ مُسْبَقًا (before) → الاسْتِمَاعُ الأَوَّلُ لِلْفَهْمِ العَامِّ (listen 1) → الاسْتِمَاعُ الثَّانِي لِلتَّفَاصِيلِ / التَّحَقُّقُ (listen 2). مُشَتِّتَاتٌ = distractors: an option that uses words from the text but says something different.</a:t>
             </a:r>
@@ -2863,7 +2899,11 @@
           <a:lstStyle/>
           <a:p>
             <a:r>
-              <a:rPr lang="en-US" dirty="0"/>
+              <a:rPr lang="ar-SA" dirty="0">
+                <a:latin typeface="Amiri" pitchFamily="2" charset="-78"/>
+                <a:ea typeface="Amiri" pitchFamily="2" charset="-78"/>
+                <a:cs typeface="Amiri" pitchFamily="2" charset="-78"/>
+              </a:rPr>
               <a:t>KEY WORDS — Listening strategies (website vocabulary (2 of 2)). Hear → Say → See → Use. Transliteration is printed for Core students (cover it for Develop/Stretch).
 The strategy sequence in the words themselves: قِرَاءَةُ الأَسْئِلَةِ مُسْبَقًا (before) → الاسْتِمَاعُ الأَوَّلُ لِلْفَهْمِ العَامِّ (listen 1) → الاسْتِمَاعُ الثَّانِي لِلتَّفَاصِيلِ / التَّحَقُّقُ (listen 2). مُشَتِّتَاتٌ = distractors: an option that uses words from the text but says something different.</a:t>
             </a:r>
@@ -3348,6 +3388,7 @@
                   <a:srgbClr val="D4AF37"/>
                 </a:solidFill>
                 <a:latin typeface="Amiri" pitchFamily="2" charset="-78"/>
+                <a:ea typeface="Amiri" pitchFamily="2" charset="-78"/>
                 <a:cs typeface="Amiri" pitchFamily="2" charset="-78"/>
               </a:rPr>
               <a:t>م</a:t>
@@ -3554,6 +3595,7 @@
                   <a:srgbClr val="D4AF37"/>
                 </a:solidFill>
                 <a:latin typeface="Amiri" pitchFamily="2" charset="-78"/>
+                <a:ea typeface="Amiri" pitchFamily="2" charset="-78"/>
                 <a:cs typeface="Amiri" pitchFamily="2" charset="-78"/>
               </a:rPr>
               <a:t>الوَرَقَةُ الأُولَى — الاسْتِمَاعُ: تَدْرِيبٌ كَامِلٌ وَإِتْقَانُ الاسْتِرَاتِيجِيَّاتِ</a:t>
@@ -4011,6 +4053,7 @@
                   <a:srgbClr val="D4AF37"/>
                 </a:solidFill>
                 <a:latin typeface="Amiri" pitchFamily="2" charset="-78"/>
+                <a:ea typeface="Amiri" pitchFamily="2" charset="-78"/>
                 <a:cs typeface="Amiri" pitchFamily="2" charset="-78"/>
               </a:rPr>
               <a:t>م</a:t>
@@ -4331,6 +4374,7 @@
                   <a:srgbClr val="8A6D1E"/>
                 </a:solidFill>
                 <a:latin typeface="Amiri" pitchFamily="2" charset="-78"/>
+                <a:ea typeface="Amiri" pitchFamily="2" charset="-78"/>
                 <a:cs typeface="Amiri" pitchFamily="2" charset="-78"/>
               </a:rPr>
               <a:t>سِتُّ اسْتِرَاتِيجِيَّاتٍ</a:t>
@@ -5060,6 +5104,7 @@
                   <a:srgbClr val="1F2A37"/>
                 </a:solidFill>
                 <a:latin typeface="Amiri" pitchFamily="2" charset="-78"/>
+                <a:ea typeface="Amiri" pitchFamily="2" charset="-78"/>
                 <a:cs typeface="Amiri" pitchFamily="2" charset="-78"/>
               </a:rPr>
               <a:t>صَحِيحٌ أَنَّ</a:t>
@@ -5183,6 +5228,7 @@
                   <a:srgbClr val="1B3B6F"/>
                 </a:solidFill>
                 <a:latin typeface="Amiri" pitchFamily="2" charset="-78"/>
+                <a:ea typeface="Amiri" pitchFamily="2" charset="-78"/>
                 <a:cs typeface="Amiri" pitchFamily="2" charset="-78"/>
               </a:rPr>
               <a:t>اسْمٌ؟ رَقْمٌ؟ رَأْيٌ؟ نَوْعُ شَرْطٍ؟</a:t>
@@ -5282,6 +5328,7 @@
                   <a:srgbClr val="1B3B6F"/>
                 </a:solidFill>
                 <a:latin typeface="Amiri" pitchFamily="2" charset="-78"/>
+                <a:ea typeface="Amiri" pitchFamily="2" charset="-78"/>
                 <a:cs typeface="Amiri" pitchFamily="2" charset="-78"/>
               </a:rPr>
               <a:t>لِكَيْ · إِذَا · لَوْ</a:t>
@@ -5381,6 +5428,7 @@
                   <a:srgbClr val="1B3B6F"/>
                 </a:solidFill>
                 <a:latin typeface="Amiri" pitchFamily="2" charset="-78"/>
+                <a:ea typeface="Amiri" pitchFamily="2" charset="-78"/>
                 <a:cs typeface="Amiri" pitchFamily="2" charset="-78"/>
               </a:rPr>
               <a:t>صَحِيحٌ أَنَّ · غَيْرَ أَنَّ</a:t>
@@ -5552,6 +5600,7 @@
                   <a:srgbClr val="D4AF37"/>
                 </a:solidFill>
                 <a:latin typeface="Amiri" pitchFamily="2" charset="-78"/>
+                <a:ea typeface="Amiri" pitchFamily="2" charset="-78"/>
                 <a:cs typeface="Amiri" pitchFamily="2" charset="-78"/>
               </a:rPr>
               <a:t>م</a:t>
@@ -5872,6 +5921,7 @@
                   <a:srgbClr val="8A6D1E"/>
                 </a:solidFill>
                 <a:latin typeface="Amiri" pitchFamily="2" charset="-78"/>
+                <a:ea typeface="Amiri" pitchFamily="2" charset="-78"/>
                 <a:cs typeface="Amiri" pitchFamily="2" charset="-78"/>
               </a:rPr>
               <a:t>تَقْدِيرُ الدَّرَجَاتِ</a:t>
@@ -6496,6 +6546,7 @@
                   <a:srgbClr val="1B3B6F"/>
                 </a:solidFill>
                 <a:latin typeface="Amiri" pitchFamily="2" charset="-78"/>
+                <a:ea typeface="Amiri" pitchFamily="2" charset="-78"/>
                 <a:cs typeface="Amiri" pitchFamily="2" charset="-78"/>
               </a:rPr>
               <a:t>اخْتِيَارٌ مِنْ مُتَعَدِّدٍ</a:t>
@@ -6595,6 +6646,7 @@
                   <a:srgbClr val="1B3B6F"/>
                 </a:solidFill>
                 <a:latin typeface="Amiri" pitchFamily="2" charset="-78"/>
+                <a:ea typeface="Amiri" pitchFamily="2" charset="-78"/>
                 <a:cs typeface="Amiri" pitchFamily="2" charset="-78"/>
               </a:rPr>
               <a:t>مَنْ قَالَ ذٰلِكَ؟</a:t>
@@ -6694,6 +6746,7 @@
                   <a:srgbClr val="1B3B6F"/>
                 </a:solidFill>
                 <a:latin typeface="Amiri" pitchFamily="2" charset="-78"/>
+                <a:ea typeface="Amiri" pitchFamily="2" charset="-78"/>
                 <a:cs typeface="Amiri" pitchFamily="2" charset="-78"/>
               </a:rPr>
               <a:t>العِبَارَةُ الَّتِي يَدْعَمُهَا النَّصُّ</a:t>
@@ -6865,6 +6918,7 @@
                   <a:srgbClr val="D4AF37"/>
                 </a:solidFill>
                 <a:latin typeface="Amiri" pitchFamily="2" charset="-78"/>
+                <a:ea typeface="Amiri" pitchFamily="2" charset="-78"/>
                 <a:cs typeface="Amiri" pitchFamily="2" charset="-78"/>
               </a:rPr>
               <a:t>م</a:t>
@@ -7185,6 +7239,7 @@
                   <a:srgbClr val="8A6D1E"/>
                 </a:solidFill>
                 <a:latin typeface="Amiri" pitchFamily="2" charset="-78"/>
+                <a:ea typeface="Amiri" pitchFamily="2" charset="-78"/>
                 <a:cs typeface="Amiri" pitchFamily="2" charset="-78"/>
               </a:rPr>
               <a:t>عَلِّمِ السُّؤَالَ</a:t>
@@ -7465,6 +7520,7 @@
                   <a:srgbClr val="1B3B6F"/>
                 </a:solidFill>
                 <a:latin typeface="Amiri" pitchFamily="2" charset="-78"/>
+                <a:ea typeface="Amiri" pitchFamily="2" charset="-78"/>
                 <a:cs typeface="Amiri" pitchFamily="2" charset="-78"/>
               </a:rPr>
               <a:t>تُشِيرُ الدِّرَاسَاتُ إِلَى أَنَّ</a:t>
@@ -7709,6 +7765,7 @@
                   <a:srgbClr val="1B3B6F"/>
                 </a:solidFill>
                 <a:latin typeface="Amiri" pitchFamily="2" charset="-78"/>
+                <a:ea typeface="Amiri" pitchFamily="2" charset="-78"/>
                 <a:cs typeface="Amiri" pitchFamily="2" charset="-78"/>
               </a:rPr>
               <a:t>صَحِيحٌ أَنَّ … غَيْرَ أَنَّ</a:t>
@@ -7953,6 +8010,7 @@
                   <a:srgbClr val="1B3B6F"/>
                 </a:solidFill>
                 <a:latin typeface="Amiri" pitchFamily="2" charset="-78"/>
+                <a:ea typeface="Amiri" pitchFamily="2" charset="-78"/>
                 <a:cs typeface="Amiri" pitchFamily="2" charset="-78"/>
               </a:rPr>
               <a:t>إِذَا … سَـ · لَوْ … لَـ</a:t>
@@ -8132,6 +8190,7 @@
                   <a:srgbClr val="1B3B6F"/>
                 </a:solidFill>
                 <a:latin typeface="Amiri" pitchFamily="2" charset="-78"/>
+                <a:ea typeface="Amiri" pitchFamily="2" charset="-78"/>
                 <a:cs typeface="Amiri" pitchFamily="2" charset="-78"/>
               </a:rPr>
               <a:t>يَنْبَغِي أَنْ</a:t>
@@ -8311,6 +8370,7 @@
                   <a:srgbClr val="1B3B6F"/>
                 </a:solidFill>
                 <a:latin typeface="Amiri" pitchFamily="2" charset="-78"/>
+                <a:ea typeface="Amiri" pitchFamily="2" charset="-78"/>
                 <a:cs typeface="Amiri" pitchFamily="2" charset="-78"/>
               </a:rPr>
               <a:t>أَكَّدَ … أَنَّ</a:t>
@@ -8775,6 +8835,7 @@
                   <a:srgbClr val="D4AF37"/>
                 </a:solidFill>
                 <a:latin typeface="Amiri" pitchFamily="2" charset="-78"/>
+                <a:ea typeface="Amiri" pitchFamily="2" charset="-78"/>
                 <a:cs typeface="Amiri" pitchFamily="2" charset="-78"/>
               </a:rPr>
               <a:t>م</a:t>
@@ -9095,6 +9156,7 @@
                   <a:srgbClr val="8A6D1E"/>
                 </a:solidFill>
                 <a:latin typeface="Amiri" pitchFamily="2" charset="-78"/>
+                <a:ea typeface="Amiri" pitchFamily="2" charset="-78"/>
                 <a:cs typeface="Amiri" pitchFamily="2" charset="-78"/>
               </a:rPr>
               <a:t>الاسْتِمَاعُ</a:t>
@@ -9719,6 +9781,7 @@
                   <a:srgbClr val="1B3B6F"/>
                 </a:solidFill>
                 <a:latin typeface="Amiri" pitchFamily="2" charset="-78"/>
+                <a:ea typeface="Amiri" pitchFamily="2" charset="-78"/>
                 <a:cs typeface="Amiri" pitchFamily="2" charset="-78"/>
               </a:rPr>
               <a:t>صَحِيحٌ أَنَّ</a:t>
@@ -10183,6 +10246,7 @@
                   <a:srgbClr val="1B3B6F"/>
                 </a:solidFill>
                 <a:latin typeface="Amiri" pitchFamily="2" charset="-78"/>
+                <a:ea typeface="Amiri" pitchFamily="2" charset="-78"/>
                 <a:cs typeface="Amiri" pitchFamily="2" charset="-78"/>
               </a:rPr>
               <a:t>غَيْرَ أَنَّ</a:t>
@@ -11523,6 +11587,7 @@
                   <a:srgbClr val="1B3B6F"/>
                 </a:solidFill>
                 <a:latin typeface="Amiri" pitchFamily="2" charset="-78"/>
+                <a:ea typeface="Amiri" pitchFamily="2" charset="-78"/>
                 <a:cs typeface="Amiri" pitchFamily="2" charset="-78"/>
               </a:rPr>
               <a:t>يَنْبَغِي أَنْ</a:t>
@@ -12848,6 +12913,7 @@
                   <a:srgbClr val="D4AF37"/>
                 </a:solidFill>
                 <a:latin typeface="Amiri" pitchFamily="2" charset="-78"/>
+                <a:ea typeface="Amiri" pitchFamily="2" charset="-78"/>
                 <a:cs typeface="Amiri" pitchFamily="2" charset="-78"/>
               </a:rPr>
               <a:t>م</a:t>
@@ -13168,6 +13234,7 @@
                   <a:srgbClr val="8A6D1E"/>
                 </a:solidFill>
                 <a:latin typeface="Amiri" pitchFamily="2" charset="-78"/>
+                <a:ea typeface="Amiri" pitchFamily="2" charset="-78"/>
                 <a:cs typeface="Amiri" pitchFamily="2" charset="-78"/>
               </a:rPr>
               <a:t>نَصُّ الاسْتِمَاعِ</a:t>
@@ -13271,6 +13338,7 @@
                   <a:srgbClr val="1B3B6F"/>
                 </a:solidFill>
                 <a:latin typeface="Amiri" pitchFamily="2" charset="-78"/>
+                <a:ea typeface="Amiri" pitchFamily="2" charset="-78"/>
                 <a:cs typeface="Amiri" pitchFamily="2" charset="-78"/>
               </a:rPr>
               <a:t>يَقُولُ الخَبِيرُ: تُشِيرُ الدِّرَاسَاتُ إِلَى أَنَّ النَّوْمَ الجَيِّدَ أَسَاسُ الصِّحَّةِ.</a:t>
@@ -13374,6 +13442,7 @@
                   <a:srgbClr val="1B3B6F"/>
                 </a:solidFill>
                 <a:latin typeface="Amiri" pitchFamily="2" charset="-78"/>
+                <a:ea typeface="Amiri" pitchFamily="2" charset="-78"/>
                 <a:cs typeface="Amiri" pitchFamily="2" charset="-78"/>
               </a:rPr>
               <a:t>صَحِيحٌ أَنَّ الرِّيَاضَةَ مُهِمَّةٌ، غَيْرَ أَنَّ الرَّاحَةَ لَا تَقِلُّ أَهَمِّيَّةً عَنْهَا.</a:t>
@@ -13480,6 +13549,7 @@
                   <a:srgbClr val="1B3B6F"/>
                 </a:solidFill>
                 <a:latin typeface="Amiri" pitchFamily="2" charset="-78"/>
+                <a:ea typeface="Amiri" pitchFamily="2" charset="-78"/>
                 <a:cs typeface="Amiri" pitchFamily="2" charset="-78"/>
               </a:rPr>
               <a:t>إِذَا نَامَ الإِنْسَانُ سَبْعَ سَاعَاتٍ، سَيَتَحَسَّنُ تَرْكِيزُهُ. وَلَوْ قَلَّلْنَا مِنَ الشَّاشَاتِ لَيْلًا، لَنِمْنَا بِعُمْقٍ أَكْبَرَ.</a:t>
@@ -13586,6 +13656,7 @@
                   <a:srgbClr val="1B3B6F"/>
                 </a:solidFill>
                 <a:latin typeface="Amiri" pitchFamily="2" charset="-78"/>
+                <a:ea typeface="Amiri" pitchFamily="2" charset="-78"/>
                 <a:cs typeface="Amiri" pitchFamily="2" charset="-78"/>
               </a:rPr>
               <a:t>وَيَنْبَغِي أَنْ نَحْرِصَ عَلَى غِذَاءٍ مُتَوَازِنٍ. وَأَكَّدَ الخَبِيرُ أَنَّ التَّوَتُّرَ المُزْمِنَ يُضْعِفُ المَنَاعَةَ.</a:t>
@@ -13757,6 +13828,7 @@
                   <a:srgbClr val="D4AF37"/>
                 </a:solidFill>
                 <a:latin typeface="Amiri" pitchFamily="2" charset="-78"/>
+                <a:ea typeface="Amiri" pitchFamily="2" charset="-78"/>
                 <a:cs typeface="Amiri" pitchFamily="2" charset="-78"/>
               </a:rPr>
               <a:t>م</a:t>
@@ -14077,6 +14149,7 @@
                   <a:srgbClr val="8A6D1E"/>
                 </a:solidFill>
                 <a:latin typeface="Amiri" pitchFamily="2" charset="-78"/>
+                <a:ea typeface="Amiri" pitchFamily="2" charset="-78"/>
                 <a:cs typeface="Amiri" pitchFamily="2" charset="-78"/>
               </a:rPr>
               <a:t>الإِجَابَاتُ</a:t>
@@ -14618,6 +14691,7 @@
                   <a:srgbClr val="8A6D1E"/>
                 </a:solidFill>
                 <a:latin typeface="Amiri" pitchFamily="2" charset="-78"/>
+                <a:ea typeface="Amiri" pitchFamily="2" charset="-78"/>
                 <a:cs typeface="Amiri" pitchFamily="2" charset="-78"/>
               </a:rPr>
               <a:t>تُشِيرُ الدِّرَاسَاتُ إِلَى أَنَّ النَّوْمَ الجَيِّدَ أَسَاسُ الصِّحَّةِ.</a:t>
@@ -14766,6 +14840,7 @@
                   <a:srgbClr val="1B3B6F"/>
                 </a:solidFill>
                 <a:latin typeface="Amiri" pitchFamily="2" charset="-78"/>
+                <a:ea typeface="Amiri" pitchFamily="2" charset="-78"/>
                 <a:cs typeface="Amiri" pitchFamily="2" charset="-78"/>
               </a:rPr>
               <a:t>صَحِيحٌ أَنَّ</a:t>
@@ -15147,6 +15222,7 @@
                   <a:srgbClr val="8A6D1E"/>
                 </a:solidFill>
                 <a:latin typeface="Amiri" pitchFamily="2" charset="-78"/>
+                <a:ea typeface="Amiri" pitchFamily="2" charset="-78"/>
                 <a:cs typeface="Amiri" pitchFamily="2" charset="-78"/>
               </a:rPr>
               <a:t>صَحِيحٌ أَنَّ الرِّيَاضَةَ مُهِمَّةٌ.</a:t>
@@ -15295,6 +15371,7 @@
                   <a:srgbClr val="1B3B6F"/>
                 </a:solidFill>
                 <a:latin typeface="Amiri" pitchFamily="2" charset="-78"/>
+                <a:ea typeface="Amiri" pitchFamily="2" charset="-78"/>
                 <a:cs typeface="Amiri" pitchFamily="2" charset="-78"/>
               </a:rPr>
               <a:t>غَيْرَ أَنَّ</a:t>
@@ -15676,6 +15753,7 @@
                   <a:srgbClr val="8A6D1E"/>
                 </a:solidFill>
                 <a:latin typeface="Amiri" pitchFamily="2" charset="-78"/>
+                <a:ea typeface="Amiri" pitchFamily="2" charset="-78"/>
                 <a:cs typeface="Amiri" pitchFamily="2" charset="-78"/>
               </a:rPr>
               <a:t>غَيْرَ أَنَّ الرَّاحَةَ لَا تَقِلُّ أَهَمِّيَّةً عَنْهَا.</a:t>
@@ -16179,6 +16257,7 @@
                   <a:srgbClr val="8A6D1E"/>
                 </a:solidFill>
                 <a:latin typeface="Amiri" pitchFamily="2" charset="-78"/>
+                <a:ea typeface="Amiri" pitchFamily="2" charset="-78"/>
                 <a:cs typeface="Amiri" pitchFamily="2" charset="-78"/>
               </a:rPr>
               <a:t>إِذَا نَامَ الإِنْسَانُ سَبْعَ سَاعَاتٍ، سَيَتَحَسَّنُ تَرْكِيزُهُ.</a:t>
@@ -16682,6 +16761,7 @@
                   <a:srgbClr val="8A6D1E"/>
                 </a:solidFill>
                 <a:latin typeface="Amiri" pitchFamily="2" charset="-78"/>
+                <a:ea typeface="Amiri" pitchFamily="2" charset="-78"/>
                 <a:cs typeface="Amiri" pitchFamily="2" charset="-78"/>
               </a:rPr>
               <a:t>لَوْ قَلَّلْنَا مِنَ الشَّاشَاتِ لَيْلًا، لَنِمْنَا بِعُمْقٍ أَكْبَرَ.</a:t>
@@ -16830,6 +16910,7 @@
                   <a:srgbClr val="1B3B6F"/>
                 </a:solidFill>
                 <a:latin typeface="Amiri" pitchFamily="2" charset="-78"/>
+                <a:ea typeface="Amiri" pitchFamily="2" charset="-78"/>
                 <a:cs typeface="Amiri" pitchFamily="2" charset="-78"/>
               </a:rPr>
               <a:t>يَنْبَغِي أَنْ</a:t>
@@ -17211,6 +17292,7 @@
                   <a:srgbClr val="8A6D1E"/>
                 </a:solidFill>
                 <a:latin typeface="Amiri" pitchFamily="2" charset="-78"/>
+                <a:ea typeface="Amiri" pitchFamily="2" charset="-78"/>
                 <a:cs typeface="Amiri" pitchFamily="2" charset="-78"/>
               </a:rPr>
               <a:t>يَنْبَغِي أَنْ نَحْرِصَ عَلَى غِذَاءٍ مُتَوَازِنٍ.</a:t>
@@ -17714,6 +17796,7 @@
                   <a:srgbClr val="8A6D1E"/>
                 </a:solidFill>
                 <a:latin typeface="Amiri" pitchFamily="2" charset="-78"/>
+                <a:ea typeface="Amiri" pitchFamily="2" charset="-78"/>
                 <a:cs typeface="Amiri" pitchFamily="2" charset="-78"/>
               </a:rPr>
               <a:t>أَكَّدَ الخَبِيرُ أَنَّ التَّوَتُّرَ المُزْمِنَ يُضْعِفُ المَنَاعَةَ.</a:t>
@@ -18230,6 +18313,7 @@
                   <a:srgbClr val="8A6D1E"/>
                 </a:solidFill>
                 <a:latin typeface="Amiri" pitchFamily="2" charset="-78"/>
+                <a:ea typeface="Amiri" pitchFamily="2" charset="-78"/>
                 <a:cs typeface="Amiri" pitchFamily="2" charset="-78"/>
               </a:rPr>
               <a:t>صَحِيحٌ أَنَّ</a:t>
@@ -18256,6 +18340,7 @@
                   <a:srgbClr val="8A6D1E"/>
                 </a:solidFill>
                 <a:latin typeface="Amiri" pitchFamily="2" charset="-78"/>
+                <a:ea typeface="Amiri" pitchFamily="2" charset="-78"/>
                 <a:cs typeface="Amiri" pitchFamily="2" charset="-78"/>
               </a:rPr>
               <a:t>غَيْرَ أَنَّ</a:t>
@@ -18402,6 +18487,7 @@
                   <a:srgbClr val="D4AF37"/>
                 </a:solidFill>
                 <a:latin typeface="Amiri" pitchFamily="2" charset="-78"/>
+                <a:ea typeface="Amiri" pitchFamily="2" charset="-78"/>
                 <a:cs typeface="Amiri" pitchFamily="2" charset="-78"/>
               </a:rPr>
               <a:t>م</a:t>
@@ -18722,6 +18808,7 @@
                   <a:srgbClr val="8A6D1E"/>
                 </a:solidFill>
                 <a:latin typeface="Amiri" pitchFamily="2" charset="-78"/>
+                <a:ea typeface="Amiri" pitchFamily="2" charset="-78"/>
                 <a:cs typeface="Amiri" pitchFamily="2" charset="-78"/>
               </a:rPr>
               <a:t>الاسْتِمَاعُ</a:t>
@@ -19346,6 +19433,7 @@
                   <a:srgbClr val="1B3B6F"/>
                 </a:solidFill>
                 <a:latin typeface="Amiri" pitchFamily="2" charset="-78"/>
+                <a:ea typeface="Amiri" pitchFamily="2" charset="-78"/>
                 <a:cs typeface="Amiri" pitchFamily="2" charset="-78"/>
               </a:rPr>
               <a:t>صَحِيحٌ أَنَّ … غَيْرَ أَنَّ</a:t>
@@ -20248,6 +20336,7 @@
                   <a:srgbClr val="1B3B6F"/>
                 </a:solidFill>
                 <a:latin typeface="Amiri" pitchFamily="2" charset="-78"/>
+                <a:ea typeface="Amiri" pitchFamily="2" charset="-78"/>
                 <a:cs typeface="Amiri" pitchFamily="2" charset="-78"/>
               </a:rPr>
               <a:t>يَنْبَغِي أَنْ</a:t>
@@ -21573,6 +21662,7 @@
                   <a:srgbClr val="D4AF37"/>
                 </a:solidFill>
                 <a:latin typeface="Amiri" pitchFamily="2" charset="-78"/>
+                <a:ea typeface="Amiri" pitchFamily="2" charset="-78"/>
                 <a:cs typeface="Amiri" pitchFamily="2" charset="-78"/>
               </a:rPr>
               <a:t>م</a:t>
@@ -21893,6 +21983,7 @@
                   <a:srgbClr val="8A6D1E"/>
                 </a:solidFill>
                 <a:latin typeface="Amiri" pitchFamily="2" charset="-78"/>
+                <a:ea typeface="Amiri" pitchFamily="2" charset="-78"/>
                 <a:cs typeface="Amiri" pitchFamily="2" charset="-78"/>
               </a:rPr>
               <a:t>نَصُّ الاسْتِمَاعِ</a:t>
@@ -21999,6 +22090,7 @@
                   <a:srgbClr val="1B3B6F"/>
                 </a:solidFill>
                 <a:latin typeface="Amiri" pitchFamily="2" charset="-78"/>
+                <a:ea typeface="Amiri" pitchFamily="2" charset="-78"/>
                 <a:cs typeface="Amiri" pitchFamily="2" charset="-78"/>
               </a:rPr>
               <a:t>سَلْمَى: أَرَى أَنَّ الدِّرَاسَةَ فِي الخَارِجِ تُوَسِّعُ الآفَاقَ. كَرِيمٌ: صَحِيحٌ أَنَّهَا مُكْلِفَةٌ، غَيْرَ أَنَّ العَائِدَ يَسْتَحِقُّ.</a:t>
@@ -22105,6 +22197,7 @@
                   <a:srgbClr val="1B3B6F"/>
                 </a:solidFill>
                 <a:latin typeface="Amiri" pitchFamily="2" charset="-78"/>
+                <a:ea typeface="Amiri" pitchFamily="2" charset="-78"/>
                 <a:cs typeface="Amiri" pitchFamily="2" charset="-78"/>
               </a:rPr>
               <a:t>سَلْمَى: وَلَوْ تَعَلَّمْتُ لُغَةً جَدِيدَةً، لَانْفَتَحَتْ أَمَامِي فُرَصٌ أَكْثَرُ. كَرِيمٌ: وَيَنْبَغِي أَنْ نُخَطِّطَ لِلْمِيزَانِيَّةِ مُبَكِّرًا.</a:t>
@@ -22211,6 +22304,7 @@
                   <a:srgbClr val="1B3B6F"/>
                 </a:solidFill>
                 <a:latin typeface="Amiri" pitchFamily="2" charset="-78"/>
+                <a:ea typeface="Amiri" pitchFamily="2" charset="-78"/>
                 <a:cs typeface="Amiri" pitchFamily="2" charset="-78"/>
               </a:rPr>
               <a:t>سَلْمَى: وَأَكَّدَ مُسْتَشَارِي أَنَّ المِنَحَ تُخَفِّفُ العِبْءَ. كَرِيمٌ: وَإِذَا حَصَلْتُ عَلَى مِنْحَةٍ، سَأُسَافِرُ العَامَ القَادِمَ.</a:t>
@@ -22382,6 +22476,7 @@
                   <a:srgbClr val="D4AF37"/>
                 </a:solidFill>
                 <a:latin typeface="Amiri" pitchFamily="2" charset="-78"/>
+                <a:ea typeface="Amiri" pitchFamily="2" charset="-78"/>
                 <a:cs typeface="Amiri" pitchFamily="2" charset="-78"/>
               </a:rPr>
               <a:t>م</a:t>
@@ -22702,6 +22797,7 @@
                   <a:srgbClr val="8A6D1E"/>
                 </a:solidFill>
                 <a:latin typeface="Amiri" pitchFamily="2" charset="-78"/>
+                <a:ea typeface="Amiri" pitchFamily="2" charset="-78"/>
                 <a:cs typeface="Amiri" pitchFamily="2" charset="-78"/>
               </a:rPr>
               <a:t>الإِجَابَاتُ</a:t>
@@ -23243,6 +23339,7 @@
                   <a:srgbClr val="8A6D1E"/>
                 </a:solidFill>
                 <a:latin typeface="Amiri" pitchFamily="2" charset="-78"/>
+                <a:ea typeface="Amiri" pitchFamily="2" charset="-78"/>
                 <a:cs typeface="Amiri" pitchFamily="2" charset="-78"/>
               </a:rPr>
               <a:t>سَلْمَى: أَرَى أَنَّ الدِّرَاسَةَ فِي الخَارِجِ تُوَسِّعُ الآفَاقَ.</a:t>
@@ -23391,6 +23488,7 @@
                   <a:srgbClr val="1B3B6F"/>
                 </a:solidFill>
                 <a:latin typeface="Amiri" pitchFamily="2" charset="-78"/>
+                <a:ea typeface="Amiri" pitchFamily="2" charset="-78"/>
                 <a:cs typeface="Amiri" pitchFamily="2" charset="-78"/>
               </a:rPr>
               <a:t>صَحِيحٌ أَنَّ … غَيْرَ أَنَّ</a:t>
@@ -23772,6 +23870,7 @@
                   <a:srgbClr val="8A6D1E"/>
                 </a:solidFill>
                 <a:latin typeface="Amiri" pitchFamily="2" charset="-78"/>
+                <a:ea typeface="Amiri" pitchFamily="2" charset="-78"/>
                 <a:cs typeface="Amiri" pitchFamily="2" charset="-78"/>
               </a:rPr>
               <a:t>كَرِيمٌ: صَحِيحٌ أَنَّهَا مُكْلِفَةٌ، غَيْرَ أَنَّ العَائِدَ يَسْتَحِقُّ.</a:t>
@@ -24275,6 +24374,7 @@
                   <a:srgbClr val="8A6D1E"/>
                 </a:solidFill>
                 <a:latin typeface="Amiri" pitchFamily="2" charset="-78"/>
+                <a:ea typeface="Amiri" pitchFamily="2" charset="-78"/>
                 <a:cs typeface="Amiri" pitchFamily="2" charset="-78"/>
               </a:rPr>
               <a:t>سَلْمَى: لَوْ تَعَلَّمْتُ لُغَةً جَدِيدَةً، لَانْفَتَحَتْ أَمَامِي فُرَصٌ.</a:t>
@@ -24423,6 +24523,7 @@
                   <a:srgbClr val="1B3B6F"/>
                 </a:solidFill>
                 <a:latin typeface="Amiri" pitchFamily="2" charset="-78"/>
+                <a:ea typeface="Amiri" pitchFamily="2" charset="-78"/>
                 <a:cs typeface="Amiri" pitchFamily="2" charset="-78"/>
               </a:rPr>
               <a:t>يَنْبَغِي أَنْ</a:t>
@@ -24804,6 +24905,7 @@
                   <a:srgbClr val="8A6D1E"/>
                 </a:solidFill>
                 <a:latin typeface="Amiri" pitchFamily="2" charset="-78"/>
+                <a:ea typeface="Amiri" pitchFamily="2" charset="-78"/>
                 <a:cs typeface="Amiri" pitchFamily="2" charset="-78"/>
               </a:rPr>
               <a:t>كَرِيمٌ: يَنْبَغِي أَنْ نُخَطِّطَ لِلْمِيزَانِيَّةِ مُبَكِّرًا.</a:t>
@@ -25307,6 +25409,7 @@
                   <a:srgbClr val="8A6D1E"/>
                 </a:solidFill>
                 <a:latin typeface="Amiri" pitchFamily="2" charset="-78"/>
+                <a:ea typeface="Amiri" pitchFamily="2" charset="-78"/>
                 <a:cs typeface="Amiri" pitchFamily="2" charset="-78"/>
               </a:rPr>
               <a:t>سَلْمَى: أَكَّدَ مُسْتَشَارِي أَنَّ المِنَحَ تُخَفِّفُ العِبْءَ.</a:t>
@@ -25810,6 +25913,7 @@
                   <a:srgbClr val="8A6D1E"/>
                 </a:solidFill>
                 <a:latin typeface="Amiri" pitchFamily="2" charset="-78"/>
+                <a:ea typeface="Amiri" pitchFamily="2" charset="-78"/>
                 <a:cs typeface="Amiri" pitchFamily="2" charset="-78"/>
               </a:rPr>
               <a:t>كَرِيمٌ: إِذَا حَصَلْتُ عَلَى مِنْحَةٍ، سَأُسَافِرُ العَامَ القَادِمَ.</a:t>
@@ -25943,6 +26047,7 @@
                   <a:srgbClr val="D4AF37"/>
                 </a:solidFill>
                 <a:latin typeface="Amiri" pitchFamily="2" charset="-78"/>
+                <a:ea typeface="Amiri" pitchFamily="2" charset="-78"/>
                 <a:cs typeface="Amiri" pitchFamily="2" charset="-78"/>
               </a:rPr>
               <a:t>م</a:t>
@@ -26263,6 +26368,7 @@
                   <a:srgbClr val="8A6D1E"/>
                 </a:solidFill>
                 <a:latin typeface="Amiri" pitchFamily="2" charset="-78"/>
+                <a:ea typeface="Amiri" pitchFamily="2" charset="-78"/>
                 <a:cs typeface="Amiri" pitchFamily="2" charset="-78"/>
               </a:rPr>
               <a:t>الاسْتِمَاعُ</a:t>
@@ -27325,6 +27431,7 @@
                   <a:srgbClr val="1B3B6F"/>
                 </a:solidFill>
                 <a:latin typeface="Amiri" pitchFamily="2" charset="-78"/>
+                <a:ea typeface="Amiri" pitchFamily="2" charset="-78"/>
                 <a:cs typeface="Amiri" pitchFamily="2" charset="-78"/>
               </a:rPr>
               <a:t>لِكَيْ</a:t>
@@ -28227,6 +28334,7 @@
                   <a:srgbClr val="1B3B6F"/>
                 </a:solidFill>
                 <a:latin typeface="Amiri" pitchFamily="2" charset="-78"/>
+                <a:ea typeface="Amiri" pitchFamily="2" charset="-78"/>
                 <a:cs typeface="Amiri" pitchFamily="2" charset="-78"/>
               </a:rPr>
               <a:t>يَرْجُو</a:t>
@@ -29114,6 +29222,7 @@
                   <a:srgbClr val="D4AF37"/>
                 </a:solidFill>
                 <a:latin typeface="Amiri" pitchFamily="2" charset="-78"/>
+                <a:ea typeface="Amiri" pitchFamily="2" charset="-78"/>
                 <a:cs typeface="Amiri" pitchFamily="2" charset="-78"/>
               </a:rPr>
               <a:t>م</a:t>
@@ -29434,6 +29543,7 @@
                   <a:srgbClr val="8A6D1E"/>
                 </a:solidFill>
                 <a:latin typeface="Amiri" pitchFamily="2" charset="-78"/>
+                <a:ea typeface="Amiri" pitchFamily="2" charset="-78"/>
                 <a:cs typeface="Amiri" pitchFamily="2" charset="-78"/>
               </a:rPr>
               <a:t>آدَابُ الصَّفِّ</a:t>
@@ -30965,6 +31075,7 @@
                   <a:srgbClr val="D4AF37"/>
                 </a:solidFill>
                 <a:latin typeface="Amiri" pitchFamily="2" charset="-78"/>
+                <a:ea typeface="Amiri" pitchFamily="2" charset="-78"/>
                 <a:cs typeface="Amiri" pitchFamily="2" charset="-78"/>
               </a:rPr>
               <a:t>م</a:t>
@@ -31285,6 +31396,7 @@
                   <a:srgbClr val="8A6D1E"/>
                 </a:solidFill>
                 <a:latin typeface="Amiri" pitchFamily="2" charset="-78"/>
+                <a:ea typeface="Amiri" pitchFamily="2" charset="-78"/>
                 <a:cs typeface="Amiri" pitchFamily="2" charset="-78"/>
               </a:rPr>
               <a:t>نَصُّ الاسْتِمَاعِ</a:t>
@@ -31391,6 +31503,7 @@
                   <a:srgbClr val="1B3B6F"/>
                 </a:solidFill>
                 <a:latin typeface="Amiri" pitchFamily="2" charset="-78"/>
+                <a:ea typeface="Amiri" pitchFamily="2" charset="-78"/>
                 <a:cs typeface="Amiri" pitchFamily="2" charset="-78"/>
               </a:rPr>
               <a:t>يَقُولُ المُخَطِّطُ: كَانَتِ المَدِينَةُ قَدْ عَانَتْ مِنَ التَّلَوُّثِ لِسَنَوَاتٍ. وَاليَوْمَ يَتَطَلَّبُ الأَمْرُ أَنْ نَسْتَثْمِرَ فِي النَّقْلِ النَّظِيفِ.</a:t>
@@ -31497,6 +31610,7 @@
                   <a:srgbClr val="1B3B6F"/>
                 </a:solidFill>
                 <a:latin typeface="Amiri" pitchFamily="2" charset="-78"/>
+                <a:ea typeface="Amiri" pitchFamily="2" charset="-78"/>
                 <a:cs typeface="Amiri" pitchFamily="2" charset="-78"/>
               </a:rPr>
               <a:t>صُمِّمَتِ الحَدَائِقُ الجَدِيدَةُ لِكَيْ تُنَقِّيَ الهَوَاءَ. وَإِذَا اعْتَمَدْنَا عَلَى الطَّاقَةِ الشَّمْسِيَّةِ، سَتَنْخَفِضُ الانْبِعَاثَاتُ.</a:t>
@@ -31600,6 +31714,7 @@
                   <a:srgbClr val="1B3B6F"/>
                 </a:solidFill>
                 <a:latin typeface="Amiri" pitchFamily="2" charset="-78"/>
+                <a:ea typeface="Amiri" pitchFamily="2" charset="-78"/>
                 <a:cs typeface="Amiri" pitchFamily="2" charset="-78"/>
               </a:rPr>
               <a:t>وَيَرْجُو المُخَطِّطُ أَنْ تُصْبِحَ المَدِينَةُ نَمُوذَجًا يُحْتَذَى.</a:t>
@@ -31771,6 +31886,7 @@
                   <a:srgbClr val="D4AF37"/>
                 </a:solidFill>
                 <a:latin typeface="Amiri" pitchFamily="2" charset="-78"/>
+                <a:ea typeface="Amiri" pitchFamily="2" charset="-78"/>
                 <a:cs typeface="Amiri" pitchFamily="2" charset="-78"/>
               </a:rPr>
               <a:t>م</a:t>
@@ -32091,6 +32207,7 @@
                   <a:srgbClr val="8A6D1E"/>
                 </a:solidFill>
                 <a:latin typeface="Amiri" pitchFamily="2" charset="-78"/>
+                <a:ea typeface="Amiri" pitchFamily="2" charset="-78"/>
                 <a:cs typeface="Amiri" pitchFamily="2" charset="-78"/>
               </a:rPr>
               <a:t>الإِجَابَاتُ</a:t>
@@ -32632,6 +32749,7 @@
                   <a:srgbClr val="8A6D1E"/>
                 </a:solidFill>
                 <a:latin typeface="Amiri" pitchFamily="2" charset="-78"/>
+                <a:ea typeface="Amiri" pitchFamily="2" charset="-78"/>
                 <a:cs typeface="Amiri" pitchFamily="2" charset="-78"/>
               </a:rPr>
               <a:t>كَانَتِ المَدِينَةُ قَدْ عَانَتْ مِنَ التَّلَوُّثِ لِسَنَوَاتٍ.</a:t>
@@ -33135,6 +33253,7 @@
                   <a:srgbClr val="8A6D1E"/>
                 </a:solidFill>
                 <a:latin typeface="Amiri" pitchFamily="2" charset="-78"/>
+                <a:ea typeface="Amiri" pitchFamily="2" charset="-78"/>
                 <a:cs typeface="Amiri" pitchFamily="2" charset="-78"/>
               </a:rPr>
               <a:t>يَتَطَلَّبُ الأَمْرُ أَنْ نَسْتَثْمِرَ فِي النَّقْلِ النَّظِيفِ.</a:t>
@@ -33283,6 +33402,7 @@
                   <a:srgbClr val="1B3B6F"/>
                 </a:solidFill>
                 <a:latin typeface="Amiri" pitchFamily="2" charset="-78"/>
+                <a:ea typeface="Amiri" pitchFamily="2" charset="-78"/>
                 <a:cs typeface="Amiri" pitchFamily="2" charset="-78"/>
               </a:rPr>
               <a:t>لِكَيْ</a:t>
@@ -33664,6 +33784,7 @@
                   <a:srgbClr val="8A6D1E"/>
                 </a:solidFill>
                 <a:latin typeface="Amiri" pitchFamily="2" charset="-78"/>
+                <a:ea typeface="Amiri" pitchFamily="2" charset="-78"/>
                 <a:cs typeface="Amiri" pitchFamily="2" charset="-78"/>
               </a:rPr>
               <a:t>صُمِّمَتِ الحَدَائِقُ الجَدِيدَةُ لِكَيْ تُنَقِّيَ الهَوَاءَ.</a:t>
@@ -34167,6 +34288,7 @@
                   <a:srgbClr val="8A6D1E"/>
                 </a:solidFill>
                 <a:latin typeface="Amiri" pitchFamily="2" charset="-78"/>
+                <a:ea typeface="Amiri" pitchFamily="2" charset="-78"/>
                 <a:cs typeface="Amiri" pitchFamily="2" charset="-78"/>
               </a:rPr>
               <a:t>إِذَا اعْتَمَدْنَا عَلَى الطَّاقَةِ الشَّمْسِيَّةِ، سَتَنْخَفِضُ الانْبِعَاثَاتُ.</a:t>
@@ -34315,6 +34437,7 @@
                   <a:srgbClr val="1B3B6F"/>
                 </a:solidFill>
                 <a:latin typeface="Amiri" pitchFamily="2" charset="-78"/>
+                <a:ea typeface="Amiri" pitchFamily="2" charset="-78"/>
                 <a:cs typeface="Amiri" pitchFamily="2" charset="-78"/>
               </a:rPr>
               <a:t>يَرْجُو</a:t>
@@ -34696,6 +34819,7 @@
                   <a:srgbClr val="8A6D1E"/>
                 </a:solidFill>
                 <a:latin typeface="Amiri" pitchFamily="2" charset="-78"/>
+                <a:ea typeface="Amiri" pitchFamily="2" charset="-78"/>
                 <a:cs typeface="Amiri" pitchFamily="2" charset="-78"/>
               </a:rPr>
               <a:t>يَرْجُو المُخَطِّطُ أَنْ تُصْبِحَ المَدِينَةُ نَمُوذَجًا يُحْتَذَى.</a:t>
@@ -35332,6 +35456,7 @@
                   <a:srgbClr val="D4AF37"/>
                 </a:solidFill>
                 <a:latin typeface="Amiri" pitchFamily="2" charset="-78"/>
+                <a:ea typeface="Amiri" pitchFamily="2" charset="-78"/>
                 <a:cs typeface="Amiri" pitchFamily="2" charset="-78"/>
               </a:rPr>
               <a:t>م</a:t>
@@ -35652,6 +35777,7 @@
                   <a:srgbClr val="8A6D1E"/>
                 </a:solidFill>
                 <a:latin typeface="Amiri" pitchFamily="2" charset="-78"/>
+                <a:ea typeface="Amiri" pitchFamily="2" charset="-78"/>
                 <a:cs typeface="Amiri" pitchFamily="2" charset="-78"/>
               </a:rPr>
               <a:t>التَّحَدُّثُ</a:t>
@@ -36422,6 +36548,7 @@
                   <a:srgbClr val="1B3B6F"/>
                 </a:solidFill>
                 <a:latin typeface="Amiri" pitchFamily="2" charset="-78"/>
+                <a:ea typeface="Amiri" pitchFamily="2" charset="-78"/>
                 <a:cs typeface="Amiri" pitchFamily="2" charset="-78"/>
               </a:rPr>
               <a:t>مَاذَا قَالَ الخَبِيرُ عَنِ النَّوْمِ؟</a:t>
@@ -36559,6 +36686,7 @@
                   <a:srgbClr val="1B3B6F"/>
                 </a:solidFill>
                 <a:latin typeface="Amiri" pitchFamily="2" charset="-78"/>
+                <a:ea typeface="Amiri" pitchFamily="2" charset="-78"/>
                 <a:cs typeface="Amiri" pitchFamily="2" charset="-78"/>
               </a:rPr>
               <a:t>بِمَ سَلَّمَ كَرِيمٌ، وَكَيْفَ رَدَّ؟</a:t>
@@ -36696,6 +36824,7 @@
                   <a:srgbClr val="1B3B6F"/>
                 </a:solidFill>
                 <a:latin typeface="Amiri" pitchFamily="2" charset="-78"/>
+                <a:ea typeface="Amiri" pitchFamily="2" charset="-78"/>
                 <a:cs typeface="Amiri" pitchFamily="2" charset="-78"/>
               </a:rPr>
               <a:t>مَاذَا يَرْجُو المُخَطِّطُ، وَمَاذَا يَتَطَلَّبُ ذٰلِكَ؟</a:t>
@@ -36871,6 +37000,7 @@
                   <a:srgbClr val="1D5FBF"/>
                 </a:solidFill>
                 <a:latin typeface="Amiri" pitchFamily="2" charset="-78"/>
+                <a:ea typeface="Amiri" pitchFamily="2" charset="-78"/>
                 <a:cs typeface="Amiri" pitchFamily="2" charset="-78"/>
               </a:rPr>
               <a:t>قَالَ الخَبِيرُ إِنَّ ___ .</a:t>
@@ -36974,6 +37104,7 @@
                   <a:srgbClr val="1F2A37"/>
                 </a:solidFill>
                 <a:latin typeface="Amiri" pitchFamily="2" charset="-78"/>
+                <a:ea typeface="Amiri" pitchFamily="2" charset="-78"/>
                 <a:cs typeface="Amiri" pitchFamily="2" charset="-78"/>
               </a:rPr>
               <a:t>سَلَّمَ كَرِيمٌ بِأَنَّ ___ ، ثُمَّ رَدَّ بِأَنَّ ___ .</a:t>
@@ -37077,6 +37208,7 @@
                   <a:srgbClr val="1F2A37"/>
                 </a:solidFill>
                 <a:latin typeface="Amiri" pitchFamily="2" charset="-78"/>
+                <a:ea typeface="Amiri" pitchFamily="2" charset="-78"/>
                 <a:cs typeface="Amiri" pitchFamily="2" charset="-78"/>
               </a:rPr>
               <a:t>يَرْجُو المُخَطِّطُ أَنْ ___ ، وَيَتَطَلَّبُ ذٰلِكَ أَنْ ___ .</a:t>
@@ -37250,6 +37382,7 @@
                   <a:srgbClr val="1F2A37"/>
                 </a:solidFill>
                 <a:latin typeface="Amiri" pitchFamily="2" charset="-78"/>
+                <a:ea typeface="Amiri" pitchFamily="2" charset="-78"/>
                 <a:cs typeface="Amiri" pitchFamily="2" charset="-78"/>
               </a:rPr>
               <a:t>قَالَ الخَبِيرُ إِنَّ النَّوْمَ الجَيِّدَ أَسَاسُ الصِّحَّةِ.</a:t>
@@ -37389,6 +37522,7 @@
                   <a:srgbClr val="1F2A37"/>
                 </a:solidFill>
                 <a:latin typeface="Amiri" pitchFamily="2" charset="-78"/>
+                <a:ea typeface="Amiri" pitchFamily="2" charset="-78"/>
                 <a:cs typeface="Amiri" pitchFamily="2" charset="-78"/>
               </a:rPr>
               <a:t>سَلَّمَ كَرِيمٌ بِأَنَّ الدِّرَاسَةَ مُكْلِفَةٌ، ثُمَّ رَدَّ بِأَنَّ العَائِدَ يَسْتَحِقُّ.</a:t>
@@ -37560,6 +37694,7 @@
                   <a:srgbClr val="D4AF37"/>
                 </a:solidFill>
                 <a:latin typeface="Amiri" pitchFamily="2" charset="-78"/>
+                <a:ea typeface="Amiri" pitchFamily="2" charset="-78"/>
                 <a:cs typeface="Amiri" pitchFamily="2" charset="-78"/>
               </a:rPr>
               <a:t>م</a:t>
@@ -37880,6 +38015,7 @@
                   <a:srgbClr val="8A6D1E"/>
                 </a:solidFill>
                 <a:latin typeface="Amiri" pitchFamily="2" charset="-78"/>
+                <a:ea typeface="Amiri" pitchFamily="2" charset="-78"/>
                 <a:cs typeface="Amiri" pitchFamily="2" charset="-78"/>
               </a:rPr>
               <a:t>تَحْلِيلُ الأَدَاءِ</a:t>
@@ -38933,6 +39069,7 @@
                   <a:srgbClr val="D4AF37"/>
                 </a:solidFill>
                 <a:latin typeface="Amiri" pitchFamily="2" charset="-78"/>
+                <a:ea typeface="Amiri" pitchFamily="2" charset="-78"/>
                 <a:cs typeface="Amiri" pitchFamily="2" charset="-78"/>
               </a:rPr>
               <a:t>م</a:t>
@@ -39253,6 +39390,7 @@
                   <a:srgbClr val="8A6D1E"/>
                 </a:solidFill>
                 <a:latin typeface="Amiri" pitchFamily="2" charset="-78"/>
+                <a:ea typeface="Amiri" pitchFamily="2" charset="-78"/>
                 <a:cs typeface="Amiri" pitchFamily="2" charset="-78"/>
               </a:rPr>
               <a:t>التَّأَمُّلُ</a:t>
@@ -39777,6 +39915,7 @@
                   <a:srgbClr val="1B3B6F"/>
                 </a:solidFill>
                 <a:latin typeface="Amiri" pitchFamily="2" charset="-78"/>
+                <a:ea typeface="Amiri" pitchFamily="2" charset="-78"/>
                 <a:cs typeface="Amiri" pitchFamily="2" charset="-78"/>
               </a:rPr>
               <a:t>قِرَاءَةُ الأَسْئِلَةِ مُسْبَقًا</a:t>
@@ -39853,6 +39992,7 @@
                   <a:srgbClr val="1B3B6F"/>
                 </a:solidFill>
                 <a:latin typeface="Amiri" pitchFamily="2" charset="-78"/>
+                <a:ea typeface="Amiri" pitchFamily="2" charset="-78"/>
                 <a:cs typeface="Amiri" pitchFamily="2" charset="-78"/>
               </a:rPr>
               <a:t>أَهَمُّ اسْتِرَاتِيجِيَّةٍ عِنْدِي هِيَ ______ .</a:t>
@@ -40024,6 +40164,7 @@
                   <a:srgbClr val="D4AF37"/>
                 </a:solidFill>
                 <a:latin typeface="Amiri" pitchFamily="2" charset="-78"/>
+                <a:ea typeface="Amiri" pitchFamily="2" charset="-78"/>
                 <a:cs typeface="Amiri" pitchFamily="2" charset="-78"/>
               </a:rPr>
               <a:t>م</a:t>
@@ -40344,6 +40485,7 @@
                   <a:srgbClr val="8A6D1E"/>
                 </a:solidFill>
                 <a:latin typeface="Amiri" pitchFamily="2" charset="-78"/>
+                <a:ea typeface="Amiri" pitchFamily="2" charset="-78"/>
                 <a:cs typeface="Amiri" pitchFamily="2" charset="-78"/>
               </a:rPr>
               <a:t>قَيِّمْ عَمَلَكَ</a:t>
@@ -41501,6 +41643,7 @@
                   <a:srgbClr val="D4AF37"/>
                 </a:solidFill>
                 <a:latin typeface="Amiri" pitchFamily="2" charset="-78"/>
+                <a:ea typeface="Amiri" pitchFamily="2" charset="-78"/>
                 <a:cs typeface="Amiri" pitchFamily="2" charset="-78"/>
               </a:rPr>
               <a:t>م</a:t>
@@ -41821,6 +41964,7 @@
                   <a:srgbClr val="8A6D1E"/>
                 </a:solidFill>
                 <a:latin typeface="Amiri" pitchFamily="2" charset="-78"/>
+                <a:ea typeface="Amiri" pitchFamily="2" charset="-78"/>
                 <a:cs typeface="Amiri" pitchFamily="2" charset="-78"/>
               </a:rPr>
               <a:t>التَّحْضِيرُ لِلدَّرْسِ القَادِمِ</a:t>
@@ -42034,6 +42178,7 @@
                   <a:srgbClr val="1B3B6F"/>
                 </a:solidFill>
                 <a:latin typeface="Amiri" pitchFamily="2" charset="-78"/>
+                <a:ea typeface="Amiri" pitchFamily="2" charset="-78"/>
                 <a:cs typeface="Amiri" pitchFamily="2" charset="-78"/>
               </a:rPr>
               <a:t>المَعْنَى العَامُّ</a:t>
@@ -42123,6 +42268,7 @@
                   <a:srgbClr val="1B3B6F"/>
                 </a:solidFill>
                 <a:latin typeface="Amiri" pitchFamily="2" charset="-78"/>
+                <a:ea typeface="Amiri" pitchFamily="2" charset="-78"/>
                 <a:cs typeface="Amiri" pitchFamily="2" charset="-78"/>
               </a:rPr>
               <a:t>التَّفَاصِيلُ الوَاقِعِيَّةُ</a:t>
@@ -42169,11 +42315,12 @@
               <a:buNone/>
             </a:pPr>
             <a:r>
-              <a:rPr lang="en-US" sz="1000" i="1" dirty="0">
+              <a:rPr lang="ar-SA" sz="1000" i="1" dirty="0">
                 <a:solidFill>
                   <a:srgbClr val="5A6472"/>
                 </a:solidFill>
                 <a:latin typeface="Calibri" pitchFamily="34" charset="0"/>
+                <a:ea typeface="Amiri" pitchFamily="2" charset="-78"/>
                 <a:cs typeface="Amiri" pitchFamily="2" charset="-78"/>
               </a:rPr>
               <a:t>  sg. تَفْصِيلٌ</a:t>
@@ -42212,6 +42359,7 @@
                   <a:srgbClr val="1B3B6F"/>
                 </a:solidFill>
                 <a:latin typeface="Amiri" pitchFamily="2" charset="-78"/>
+                <a:ea typeface="Amiri" pitchFamily="2" charset="-78"/>
                 <a:cs typeface="Amiri" pitchFamily="2" charset="-78"/>
               </a:rPr>
               <a:t>الأَدِلَّةُ النَّصِّيَّةُ</a:t>
@@ -42258,11 +42406,12 @@
               <a:buNone/>
             </a:pPr>
             <a:r>
-              <a:rPr lang="en-US" sz="1000" i="1" dirty="0">
+              <a:rPr lang="ar-SA" sz="1000" i="1" dirty="0">
                 <a:solidFill>
                   <a:srgbClr val="5A6472"/>
                 </a:solidFill>
                 <a:latin typeface="Calibri" pitchFamily="34" charset="0"/>
+                <a:ea typeface="Amiri" pitchFamily="2" charset="-78"/>
                 <a:cs typeface="Amiri" pitchFamily="2" charset="-78"/>
               </a:rPr>
               <a:t>  sg. دَلِيلٌ</a:t>
@@ -42301,6 +42450,7 @@
                   <a:srgbClr val="1B3B6F"/>
                 </a:solidFill>
                 <a:latin typeface="Amiri" pitchFamily="2" charset="-78"/>
+                <a:ea typeface="Amiri" pitchFamily="2" charset="-78"/>
                 <a:cs typeface="Amiri" pitchFamily="2" charset="-78"/>
               </a:rPr>
               <a:t>اسْتِنْتَاجُ الكَلِمَاتِ المَجْهُولَةِ</a:t>
@@ -42390,6 +42540,7 @@
                   <a:srgbClr val="1B3B6F"/>
                 </a:solidFill>
                 <a:latin typeface="Amiri" pitchFamily="2" charset="-78"/>
+                <a:ea typeface="Amiri" pitchFamily="2" charset="-78"/>
                 <a:cs typeface="Amiri" pitchFamily="2" charset="-78"/>
               </a:rPr>
               <a:t>التَّطَابُقُ عَبْرَ النُّصُوصِ</a:t>
@@ -42558,6 +42709,7 @@
                   <a:srgbClr val="1B3B6F"/>
                 </a:solidFill>
                 <a:latin typeface="Amiri" pitchFamily="2" charset="-78"/>
+                <a:ea typeface="Amiri" pitchFamily="2" charset="-78"/>
                 <a:cs typeface="Amiri" pitchFamily="2" charset="-78"/>
               </a:rPr>
               <a:t>إِذَا وَجَدْتُ كَلِمَةً مَجْهُولَةً، أَبْحَثُ عَنْ ______ .</a:t>
@@ -43227,6 +43379,7 @@
                   <a:srgbClr val="FFFFFF"/>
                 </a:solidFill>
                 <a:latin typeface="Amiri" pitchFamily="2" charset="-78"/>
+                <a:ea typeface="Amiri" pitchFamily="2" charset="-78"/>
                 <a:cs typeface="Amiri" pitchFamily="2" charset="-78"/>
               </a:rPr>
               <a:t>أَحْسَنْتُمْ! إِلَى اللِّقَاءِ</a:t>
@@ -43379,6 +43532,7 @@
                   <a:srgbClr val="D4AF37"/>
                 </a:solidFill>
                 <a:latin typeface="Amiri" pitchFamily="2" charset="-78"/>
+                <a:ea typeface="Amiri" pitchFamily="2" charset="-78"/>
                 <a:cs typeface="Amiri" pitchFamily="2" charset="-78"/>
               </a:rPr>
               <a:t>الوَرَقَةُ الثَّانِيَةُ — القِرَاءَةُ</a:t>
@@ -43512,6 +43666,7 @@
                   <a:srgbClr val="D4AF37"/>
                 </a:solidFill>
                 <a:latin typeface="Amiri" pitchFamily="2" charset="-78"/>
+                <a:ea typeface="Amiri" pitchFamily="2" charset="-78"/>
                 <a:cs typeface="Amiri" pitchFamily="2" charset="-78"/>
               </a:rPr>
               <a:t>م</a:t>
@@ -43832,6 +43987,7 @@
                   <a:srgbClr val="8A6D1E"/>
                 </a:solidFill>
                 <a:latin typeface="Amiri" pitchFamily="2" charset="-78"/>
+                <a:ea typeface="Amiri" pitchFamily="2" charset="-78"/>
                 <a:cs typeface="Amiri" pitchFamily="2" charset="-78"/>
               </a:rPr>
               <a:t>خَرِيطَةُ الدَّرْسِ</a:t>
@@ -44146,6 +44302,7 @@
                   <a:srgbClr val="0E7C86"/>
                 </a:solidFill>
                 <a:latin typeface="Amiri" pitchFamily="2" charset="-78"/>
+                <a:ea typeface="Amiri" pitchFamily="2" charset="-78"/>
                 <a:cs typeface="Amiri" pitchFamily="2" charset="-78"/>
               </a:rPr>
               <a:t>اِبْدَأِ الآنَ</a:t>
@@ -44422,6 +44579,7 @@
                   <a:srgbClr val="1B3B6F"/>
                 </a:solidFill>
                 <a:latin typeface="Amiri" pitchFamily="2" charset="-78"/>
+                <a:ea typeface="Amiri" pitchFamily="2" charset="-78"/>
                 <a:cs typeface="Amiri" pitchFamily="2" charset="-78"/>
               </a:rPr>
               <a:t>الاسْتِرَاتِيجِيَّاتُ</a:t>
@@ -44698,6 +44856,7 @@
                   <a:srgbClr val="6B4C9A"/>
                 </a:solidFill>
                 <a:latin typeface="Amiri" pitchFamily="2" charset="-78"/>
+                <a:ea typeface="Amiri" pitchFamily="2" charset="-78"/>
                 <a:cs typeface="Amiri" pitchFamily="2" charset="-78"/>
               </a:rPr>
               <a:t>شَاهِدْ</a:t>
@@ -44974,6 +45133,7 @@
                   <a:srgbClr val="2F6FB0"/>
                 </a:solidFill>
                 <a:latin typeface="Amiri" pitchFamily="2" charset="-78"/>
+                <a:ea typeface="Amiri" pitchFamily="2" charset="-78"/>
                 <a:cs typeface="Amiri" pitchFamily="2" charset="-78"/>
               </a:rPr>
               <a:t>الاسْتِمَاعُ</a:t>
@@ -45250,6 +45410,7 @@
                   <a:srgbClr val="1E6B52"/>
                 </a:solidFill>
                 <a:latin typeface="Amiri" pitchFamily="2" charset="-78"/>
+                <a:ea typeface="Amiri" pitchFamily="2" charset="-78"/>
                 <a:cs typeface="Amiri" pitchFamily="2" charset="-78"/>
               </a:rPr>
               <a:t>التَّحْلِيلُ</a:t>
@@ -45526,6 +45687,7 @@
                   <a:srgbClr val="8A6D1E"/>
                 </a:solidFill>
                 <a:latin typeface="Amiri" pitchFamily="2" charset="-78"/>
+                <a:ea typeface="Amiri" pitchFamily="2" charset="-78"/>
                 <a:cs typeface="Amiri" pitchFamily="2" charset="-78"/>
               </a:rPr>
               <a:t>قَيِّمْ</a:t>
@@ -45802,6 +45964,7 @@
                   <a:srgbClr val="C45A3C"/>
                 </a:solidFill>
                 <a:latin typeface="Amiri" pitchFamily="2" charset="-78"/>
+                <a:ea typeface="Amiri" pitchFamily="2" charset="-78"/>
                 <a:cs typeface="Amiri" pitchFamily="2" charset="-78"/>
               </a:rPr>
               <a:t>اِسْتَعِدَّ</a:t>
@@ -46045,6 +46208,7 @@
                   <a:srgbClr val="D4AF37"/>
                 </a:solidFill>
                 <a:latin typeface="Amiri" pitchFamily="2" charset="-78"/>
+                <a:ea typeface="Amiri" pitchFamily="2" charset="-78"/>
                 <a:cs typeface="Amiri" pitchFamily="2" charset="-78"/>
               </a:rPr>
               <a:t>م</a:t>
@@ -46365,6 +46529,7 @@
                   <a:srgbClr val="8A6D1E"/>
                 </a:solidFill>
                 <a:latin typeface="Amiri" pitchFamily="2" charset="-78"/>
+                <a:ea typeface="Amiri" pitchFamily="2" charset="-78"/>
                 <a:cs typeface="Amiri" pitchFamily="2" charset="-78"/>
               </a:rPr>
               <a:t>اِبْدَأِ الآنَ</a:t>
@@ -46551,6 +46716,7 @@
                   <a:srgbClr val="1B3B6F"/>
                 </a:solidFill>
                 <a:latin typeface="Amiri" pitchFamily="2" charset="-78"/>
+                <a:ea typeface="Amiri" pitchFamily="2" charset="-78"/>
                 <a:cs typeface="Amiri" pitchFamily="2" charset="-78"/>
               </a:rPr>
               <a:t>قِرَاءَةُ الأَسْئِلَةِ مُسْبَقًا</a:t>
@@ -47015,6 +47181,7 @@
                   <a:srgbClr val="1B3B6F"/>
                 </a:solidFill>
                 <a:latin typeface="Amiri" pitchFamily="2" charset="-78"/>
+                <a:ea typeface="Amiri" pitchFamily="2" charset="-78"/>
                 <a:cs typeface="Amiri" pitchFamily="2" charset="-78"/>
               </a:rPr>
               <a:t>التَّحَقُّقُ فِي الاسْتِمَاعِ الثَّانِي</a:t>
@@ -47479,6 +47646,7 @@
                   <a:srgbClr val="1B3B6F"/>
                 </a:solidFill>
                 <a:latin typeface="Amiri" pitchFamily="2" charset="-78"/>
+                <a:ea typeface="Amiri" pitchFamily="2" charset="-78"/>
                 <a:cs typeface="Amiri" pitchFamily="2" charset="-78"/>
               </a:rPr>
               <a:t>مُشَتِّتَاتُ الاسْتِمَاعِ</a:t>
@@ -47943,6 +48111,7 @@
                   <a:srgbClr val="1B3B6F"/>
                 </a:solidFill>
                 <a:latin typeface="Amiri" pitchFamily="2" charset="-78"/>
+                <a:ea typeface="Amiri" pitchFamily="2" charset="-78"/>
                 <a:cs typeface="Amiri" pitchFamily="2" charset="-78"/>
               </a:rPr>
               <a:t>لَوْ … لَـ</a:t>
@@ -48407,6 +48576,7 @@
                   <a:srgbClr val="1B3B6F"/>
                 </a:solidFill>
                 <a:latin typeface="Amiri" pitchFamily="2" charset="-78"/>
+                <a:ea typeface="Amiri" pitchFamily="2" charset="-78"/>
                 <a:cs typeface="Amiri" pitchFamily="2" charset="-78"/>
               </a:rPr>
               <a:t>صَحِيحٌ أَنَّ</a:t>
@@ -49058,6 +49228,7 @@
                   <a:srgbClr val="D4AF37"/>
                 </a:solidFill>
                 <a:latin typeface="Amiri" pitchFamily="2" charset="-78"/>
+                <a:ea typeface="Amiri" pitchFamily="2" charset="-78"/>
                 <a:cs typeface="Amiri" pitchFamily="2" charset="-78"/>
               </a:rPr>
               <a:t>م</a:t>
@@ -49378,6 +49549,7 @@
                   <a:srgbClr val="8A6D1E"/>
                 </a:solidFill>
                 <a:latin typeface="Amiri" pitchFamily="2" charset="-78"/>
+                <a:ea typeface="Amiri" pitchFamily="2" charset="-78"/>
                 <a:cs typeface="Amiri" pitchFamily="2" charset="-78"/>
               </a:rPr>
               <a:t>الإِجَابَاتُ وَالتَّعْلِيلُ</a:t>
@@ -49564,6 +49736,7 @@
                   <a:srgbClr val="1B3B6F"/>
                 </a:solidFill>
                 <a:latin typeface="Amiri" pitchFamily="2" charset="-78"/>
+                <a:ea typeface="Amiri" pitchFamily="2" charset="-78"/>
                 <a:cs typeface="Amiri" pitchFamily="2" charset="-78"/>
               </a:rPr>
               <a:t>قِرَاءَةُ الأَسْئِلَةِ مُسْبَقًا</a:t>
@@ -50093,6 +50266,7 @@
                   <a:srgbClr val="1B3B6F"/>
                 </a:solidFill>
                 <a:latin typeface="Amiri" pitchFamily="2" charset="-78"/>
+                <a:ea typeface="Amiri" pitchFamily="2" charset="-78"/>
                 <a:cs typeface="Amiri" pitchFamily="2" charset="-78"/>
               </a:rPr>
               <a:t>التَّحَقُّقُ فِي الاسْتِمَاعِ الثَّانِي</a:t>
@@ -50622,6 +50796,7 @@
                   <a:srgbClr val="1B3B6F"/>
                 </a:solidFill>
                 <a:latin typeface="Amiri" pitchFamily="2" charset="-78"/>
+                <a:ea typeface="Amiri" pitchFamily="2" charset="-78"/>
                 <a:cs typeface="Amiri" pitchFamily="2" charset="-78"/>
               </a:rPr>
               <a:t>مُشَتِّتَاتُ الاسْتِمَاعِ</a:t>
@@ -51151,6 +51326,7 @@
                   <a:srgbClr val="1B3B6F"/>
                 </a:solidFill>
                 <a:latin typeface="Amiri" pitchFamily="2" charset="-78"/>
+                <a:ea typeface="Amiri" pitchFamily="2" charset="-78"/>
                 <a:cs typeface="Amiri" pitchFamily="2" charset="-78"/>
               </a:rPr>
               <a:t>لَوْ … لَـ</a:t>
@@ -51680,6 +51856,7 @@
                   <a:srgbClr val="1B3B6F"/>
                 </a:solidFill>
                 <a:latin typeface="Amiri" pitchFamily="2" charset="-78"/>
+                <a:ea typeface="Amiri" pitchFamily="2" charset="-78"/>
                 <a:cs typeface="Amiri" pitchFamily="2" charset="-78"/>
               </a:rPr>
               <a:t>صَحِيحٌ أَنَّ</a:t>
@@ -52212,6 +52389,7 @@
                   <a:srgbClr val="0E7C86"/>
                 </a:solidFill>
                 <a:latin typeface="Amiri" pitchFamily="2" charset="-78"/>
+                <a:ea typeface="Amiri" pitchFamily="2" charset="-78"/>
                 <a:cs typeface="Amiri" pitchFamily="2" charset="-78"/>
               </a:rPr>
               <a:t>إِذَا</a:t>
@@ -52228,6 +52406,7 @@
                   <a:srgbClr val="1B3B6F"/>
                 </a:solidFill>
                 <a:latin typeface="Amiri" pitchFamily="2" charset="-78"/>
+                <a:ea typeface="Amiri" pitchFamily="2" charset="-78"/>
                 <a:cs typeface="Amiri" pitchFamily="2" charset="-78"/>
               </a:rPr>
               <a:t> … سَـ · </a:t>
@@ -52244,6 +52423,7 @@
                   <a:srgbClr val="7B3FA0"/>
                 </a:solidFill>
                 <a:latin typeface="Amiri" pitchFamily="2" charset="-78"/>
+                <a:ea typeface="Amiri" pitchFamily="2" charset="-78"/>
                 <a:cs typeface="Amiri" pitchFamily="2" charset="-78"/>
               </a:rPr>
               <a:t>لَوْ</a:t>
@@ -52260,6 +52440,7 @@
                   <a:srgbClr val="1B3B6F"/>
                 </a:solidFill>
                 <a:latin typeface="Amiri" pitchFamily="2" charset="-78"/>
+                <a:ea typeface="Amiri" pitchFamily="2" charset="-78"/>
                 <a:cs typeface="Amiri" pitchFamily="2" charset="-78"/>
               </a:rPr>
               <a:t> … لَـ · </a:t>
@@ -52276,6 +52457,7 @@
                   <a:srgbClr val="1D5FBF"/>
                 </a:solidFill>
                 <a:latin typeface="Amiri" pitchFamily="2" charset="-78"/>
+                <a:ea typeface="Amiri" pitchFamily="2" charset="-78"/>
                 <a:cs typeface="Amiri" pitchFamily="2" charset="-78"/>
               </a:rPr>
               <a:t>صَحِيحٌ أَنَّ</a:t>
@@ -52308,6 +52490,7 @@
                   <a:srgbClr val="D6336C"/>
                 </a:solidFill>
                 <a:latin typeface="Amiri" pitchFamily="2" charset="-78"/>
+                <a:ea typeface="Amiri" pitchFamily="2" charset="-78"/>
                 <a:cs typeface="Amiri" pitchFamily="2" charset="-78"/>
               </a:rPr>
               <a:t>غَيْرَ أَنَّ</a:t>
@@ -52441,6 +52624,7 @@
                   <a:srgbClr val="D4AF37"/>
                 </a:solidFill>
                 <a:latin typeface="Amiri" pitchFamily="2" charset="-78"/>
+                <a:ea typeface="Amiri" pitchFamily="2" charset="-78"/>
                 <a:cs typeface="Amiri" pitchFamily="2" charset="-78"/>
               </a:rPr>
               <a:t>م</a:t>
@@ -52761,6 +52945,7 @@
                   <a:srgbClr val="8A6D1E"/>
                 </a:solidFill>
                 <a:latin typeface="Amiri" pitchFamily="2" charset="-78"/>
+                <a:ea typeface="Amiri" pitchFamily="2" charset="-78"/>
                 <a:cs typeface="Amiri" pitchFamily="2" charset="-78"/>
               </a:rPr>
               <a:t>الأَهْدَافُ وَمَعَايِيرُ النَّجَاحِ</a:t>
@@ -52909,6 +53094,7 @@
                   <a:srgbClr val="8A6D1E"/>
                 </a:solidFill>
                 <a:latin typeface="Amiri" pitchFamily="2" charset="-78"/>
+                <a:ea typeface="Amiri" pitchFamily="2" charset="-78"/>
                 <a:cs typeface="Amiri" pitchFamily="2" charset="-78"/>
               </a:rPr>
               <a:t>سَتَتَعَلَّمُ اليَوْمَ</a:t>
@@ -54167,6 +54353,7 @@
                   <a:srgbClr val="D4AF37"/>
                 </a:solidFill>
                 <a:latin typeface="Amiri" pitchFamily="2" charset="-78"/>
+                <a:ea typeface="Amiri" pitchFamily="2" charset="-78"/>
                 <a:cs typeface="Amiri" pitchFamily="2" charset="-78"/>
               </a:rPr>
               <a:t>كَلِمَاتُ الدَّرْسِ</a:t>
@@ -54389,6 +54576,7 @@
                   <a:srgbClr val="1B3B6F"/>
                 </a:solidFill>
                 <a:latin typeface="Amiri" pitchFamily="2" charset="-78"/>
+                <a:ea typeface="Amiri" pitchFamily="2" charset="-78"/>
                 <a:cs typeface="Amiri" pitchFamily="2" charset="-78"/>
               </a:rPr>
               <a:t>سُؤَالٌ</a:t>
@@ -54422,11 +54610,12 @@
               <a:buNone/>
             </a:pPr>
             <a:r>
-              <a:rPr lang="ur-PK" altLang="en-US" sz="1400" b="1" dirty="0">
+              <a:rPr lang="ar-SA" altLang="en-US" sz="1400" b="1" dirty="0">
                 <a:solidFill>
                   <a:srgbClr val="2E8B57"/>
                 </a:solidFill>
                 <a:latin typeface="Amiri" pitchFamily="2" charset="-78"/>
+                <a:ea typeface="Amiri" pitchFamily="2" charset="-78"/>
                 <a:cs typeface="Amiri" pitchFamily="2" charset="-78"/>
               </a:rPr>
               <a:t>‎سوال‎ </a:t>
@@ -54478,6 +54667,7 @@
                   <a:srgbClr val="1B3B6F"/>
                 </a:solidFill>
                 <a:latin typeface="Amiri" pitchFamily="2" charset="-78"/>
+                <a:ea typeface="Amiri" pitchFamily="2" charset="-78"/>
                 <a:cs typeface="Amiri" pitchFamily="2" charset="-78"/>
               </a:rPr>
               <a:t>تَفْصِيلٌ</a:t>
@@ -54511,11 +54701,12 @@
               <a:buNone/>
             </a:pPr>
             <a:r>
-              <a:rPr lang="ur-PK" altLang="en-US" sz="1400" b="1" dirty="0">
+              <a:rPr lang="ar-SA" altLang="en-US" sz="1400" b="1" dirty="0">
                 <a:solidFill>
                   <a:srgbClr val="2E8B57"/>
                 </a:solidFill>
                 <a:latin typeface="Amiri" pitchFamily="2" charset="-78"/>
+                <a:ea typeface="Amiri" pitchFamily="2" charset="-78"/>
                 <a:cs typeface="Amiri" pitchFamily="2" charset="-78"/>
               </a:rPr>
               <a:t>‎تفصیل‎ </a:t>
@@ -54567,6 +54758,7 @@
                   <a:srgbClr val="1B3B6F"/>
                 </a:solidFill>
                 <a:latin typeface="Amiri" pitchFamily="2" charset="-78"/>
+                <a:ea typeface="Amiri" pitchFamily="2" charset="-78"/>
                 <a:cs typeface="Amiri" pitchFamily="2" charset="-78"/>
               </a:rPr>
               <a:t>إِشَارَةٌ</a:t>
@@ -54600,11 +54792,12 @@
               <a:buNone/>
             </a:pPr>
             <a:r>
-              <a:rPr lang="ur-PK" altLang="en-US" sz="1400" b="1" dirty="0">
+              <a:rPr lang="ar-SA" altLang="en-US" sz="1400" b="1" dirty="0">
                 <a:solidFill>
                   <a:srgbClr val="2E8B57"/>
                 </a:solidFill>
                 <a:latin typeface="Amiri" pitchFamily="2" charset="-78"/>
+                <a:ea typeface="Amiri" pitchFamily="2" charset="-78"/>
                 <a:cs typeface="Amiri" pitchFamily="2" charset="-78"/>
               </a:rPr>
               <a:t>‎اشارہ‎ </a:t>
@@ -54656,6 +54849,7 @@
                   <a:srgbClr val="1B3B6F"/>
                 </a:solidFill>
                 <a:latin typeface="Amiri" pitchFamily="2" charset="-78"/>
+                <a:ea typeface="Amiri" pitchFamily="2" charset="-78"/>
                 <a:cs typeface="Amiri" pitchFamily="2" charset="-78"/>
               </a:rPr>
               <a:t>تَوَقُّعٌ</a:t>
@@ -54689,11 +54883,12 @@
               <a:buNone/>
             </a:pPr>
             <a:r>
-              <a:rPr lang="ur-PK" altLang="en-US" sz="1400" b="1" dirty="0">
+              <a:rPr lang="ar-SA" altLang="en-US" sz="1400" b="1" dirty="0">
                 <a:solidFill>
                   <a:srgbClr val="2E8B57"/>
                 </a:solidFill>
                 <a:latin typeface="Amiri" pitchFamily="2" charset="-78"/>
+                <a:ea typeface="Amiri" pitchFamily="2" charset="-78"/>
                 <a:cs typeface="Amiri" pitchFamily="2" charset="-78"/>
               </a:rPr>
               <a:t>‎توقع‎ </a:t>
@@ -54745,6 +54940,7 @@
                   <a:srgbClr val="1B3B6F"/>
                 </a:solidFill>
                 <a:latin typeface="Amiri" pitchFamily="2" charset="-78"/>
+                <a:ea typeface="Amiri" pitchFamily="2" charset="-78"/>
                 <a:cs typeface="Amiri" pitchFamily="2" charset="-78"/>
               </a:rPr>
               <a:t>تَحَقُّقٌ</a:t>
@@ -54778,11 +54974,12 @@
               <a:buNone/>
             </a:pPr>
             <a:r>
-              <a:rPr lang="ur-PK" altLang="en-US" sz="1400" b="1" dirty="0">
+              <a:rPr lang="ar-SA" altLang="en-US" sz="1400" b="1" dirty="0">
                 <a:solidFill>
                   <a:srgbClr val="2E8B57"/>
                 </a:solidFill>
                 <a:latin typeface="Amiri" pitchFamily="2" charset="-78"/>
+                <a:ea typeface="Amiri" pitchFamily="2" charset="-78"/>
                 <a:cs typeface="Amiri" pitchFamily="2" charset="-78"/>
               </a:rPr>
               <a:t>‎تصدیق‎ </a:t>
@@ -54791,11 +54988,12 @@
               <a:buNone/>
             </a:pPr>
             <a:r>
-              <a:rPr lang="en-US" sz="950" b="1" dirty="0">
+              <a:rPr lang="ar-SA" sz="950" b="1" dirty="0">
                 <a:solidFill>
                   <a:srgbClr val="2E8B57"/>
                 </a:solidFill>
                 <a:latin typeface="Calibri" pitchFamily="34" charset="0"/>
+                <a:ea typeface="Amiri" pitchFamily="2" charset="-78"/>
                 <a:cs typeface="Amiri" pitchFamily="2" charset="-78"/>
               </a:rPr>
               <a:t> tasdīq · verifying (Arabic تَصْدِيقٌ = believing, approving)</a:t>
@@ -54929,6 +55127,7 @@
                   <a:srgbClr val="D4AF37"/>
                 </a:solidFill>
                 <a:latin typeface="Amiri" pitchFamily="2" charset="-78"/>
+                <a:ea typeface="Amiri" pitchFamily="2" charset="-78"/>
                 <a:cs typeface="Amiri" pitchFamily="2" charset="-78"/>
               </a:rPr>
               <a:t>م</a:t>
@@ -55249,6 +55448,7 @@
                   <a:srgbClr val="8A6D1E"/>
                 </a:solidFill>
                 <a:latin typeface="Amiri" pitchFamily="2" charset="-78"/>
+                <a:ea typeface="Amiri" pitchFamily="2" charset="-78"/>
                 <a:cs typeface="Amiri" pitchFamily="2" charset="-78"/>
               </a:rPr>
               <a:t>كَلِمَاتُ الدَّرْسِ</a:t>
@@ -55552,6 +55752,7 @@
                   <a:srgbClr val="1B3B6F"/>
                 </a:solidFill>
                 <a:latin typeface="Amiri" pitchFamily="2" charset="-78"/>
+                <a:ea typeface="Amiri" pitchFamily="2" charset="-78"/>
                 <a:cs typeface="Amiri" pitchFamily="2" charset="-78"/>
               </a:rPr>
               <a:t>اسْتِرَاتِيجِيَّاتُ الاسْتِمَاعِ</a:t>
@@ -55709,6 +55910,7 @@
                   <a:srgbClr val="1B3B6F"/>
                 </a:solidFill>
                 <a:latin typeface="Amiri" pitchFamily="2" charset="-78"/>
+                <a:ea typeface="Amiri" pitchFamily="2" charset="-78"/>
                 <a:cs typeface="Amiri" pitchFamily="2" charset="-78"/>
               </a:rPr>
               <a:t>اسْتِرَاتِيجِيَّةٌ</a:t>
@@ -55909,6 +56111,7 @@
                   <a:srgbClr val="1B3B6F"/>
                 </a:solidFill>
                 <a:latin typeface="Amiri" pitchFamily="2" charset="-78"/>
+                <a:ea typeface="Amiri" pitchFamily="2" charset="-78"/>
                 <a:cs typeface="Amiri" pitchFamily="2" charset="-78"/>
               </a:rPr>
               <a:t>الاسْتِمَاعُ الأَوَّلُ لِلْفَهْمِ العَامِّ</a:t>
@@ -56163,6 +56366,7 @@
                   <a:srgbClr val="1B3B6F"/>
                 </a:solidFill>
                 <a:latin typeface="Amiri" pitchFamily="2" charset="-78"/>
+                <a:ea typeface="Amiri" pitchFamily="2" charset="-78"/>
                 <a:cs typeface="Amiri" pitchFamily="2" charset="-78"/>
               </a:rPr>
               <a:t>الاسْتِمَاعُ الثَّانِي لِلتَّفَاصِيلِ</a:t>
@@ -56417,6 +56621,7 @@
                   <a:srgbClr val="1B3B6F"/>
                 </a:solidFill>
                 <a:latin typeface="Amiri" pitchFamily="2" charset="-78"/>
+                <a:ea typeface="Amiri" pitchFamily="2" charset="-78"/>
                 <a:cs typeface="Amiri" pitchFamily="2" charset="-78"/>
               </a:rPr>
               <a:t>قِرَاءَةُ الأَسْئِلَةِ مُسْبَقًا</a:t>
@@ -56604,6 +56809,7 @@
                   <a:srgbClr val="D4AF37"/>
                 </a:solidFill>
                 <a:latin typeface="Amiri" pitchFamily="2" charset="-78"/>
+                <a:ea typeface="Amiri" pitchFamily="2" charset="-78"/>
                 <a:cs typeface="Amiri" pitchFamily="2" charset="-78"/>
               </a:rPr>
               <a:t>م</a:t>
@@ -56924,6 +57130,7 @@
                   <a:srgbClr val="8A6D1E"/>
                 </a:solidFill>
                 <a:latin typeface="Amiri" pitchFamily="2" charset="-78"/>
+                <a:ea typeface="Amiri" pitchFamily="2" charset="-78"/>
                 <a:cs typeface="Amiri" pitchFamily="2" charset="-78"/>
               </a:rPr>
               <a:t>كَلِمَاتُ الدَّرْسِ</a:t>
@@ -57097,6 +57304,7 @@
                   <a:srgbClr val="1B3B6F"/>
                 </a:solidFill>
                 <a:latin typeface="Amiri" pitchFamily="2" charset="-78"/>
+                <a:ea typeface="Amiri" pitchFamily="2" charset="-78"/>
                 <a:cs typeface="Amiri" pitchFamily="2" charset="-78"/>
               </a:rPr>
               <a:t>التَّنَبُّؤُ بِالمُحْتَوَى</a:t>
@@ -57286,6 +57494,7 @@
                   <a:srgbClr val="1B3B6F"/>
                 </a:solidFill>
                 <a:latin typeface="Amiri" pitchFamily="2" charset="-78"/>
+                <a:ea typeface="Amiri" pitchFamily="2" charset="-78"/>
                 <a:cs typeface="Amiri" pitchFamily="2" charset="-78"/>
               </a:rPr>
               <a:t>التَّرْكِيزُ عَلَى الإِشَارَاتِ اللُّغَوِيَّةِ</a:t>
@@ -57605,6 +57814,7 @@
                   <a:srgbClr val="1B3B6F"/>
                 </a:solidFill>
                 <a:latin typeface="Amiri" pitchFamily="2" charset="-78"/>
+                <a:ea typeface="Amiri" pitchFamily="2" charset="-78"/>
                 <a:cs typeface="Amiri" pitchFamily="2" charset="-78"/>
               </a:rPr>
               <a:t>مُشَتِّتَاتُ الاسْتِمَاعِ</a:t>
@@ -57762,6 +57972,7 @@
                   <a:srgbClr val="1B3B6F"/>
                 </a:solidFill>
                 <a:latin typeface="Amiri" pitchFamily="2" charset="-78"/>
+                <a:ea typeface="Amiri" pitchFamily="2" charset="-78"/>
                 <a:cs typeface="Amiri" pitchFamily="2" charset="-78"/>
               </a:rPr>
               <a:t>مُشَتِّتٌ</a:t>
@@ -57962,6 +58173,7 @@
                   <a:srgbClr val="1B3B6F"/>
                 </a:solidFill>
                 <a:latin typeface="Amiri" pitchFamily="2" charset="-78"/>
+                <a:ea typeface="Amiri" pitchFamily="2" charset="-78"/>
                 <a:cs typeface="Amiri" pitchFamily="2" charset="-78"/>
               </a:rPr>
               <a:t>التَّحَقُّقُ فِي الاسْتِمَاعِ الثَّانِي</a:t>
@@ -58114,13 +58326,9 @@
     <a:fontScheme name="Office">
       <a:majorFont>
         <a:latin typeface="Calibri Light" panose="020F0302020204030204"/>
-        <a:ea typeface=""/>
-        <a:cs typeface=""/>
-        <a:font script="Jpan" typeface="游ゴシック Light"/>
-        <a:font script="Hang" typeface="맑은 고딕"/>
-        <a:font script="Hans" typeface="等线 Light"/>
-        <a:font script="Hant" typeface="新細明體"/>
-        <a:font script="Arab" typeface="Times New Roman"/>
+        <a:ea typeface="Amiri" pitchFamily="2" charset="-78"/>
+        <a:cs typeface="Amiri" pitchFamily="2" charset="-78"/>
+        <a:font script="Arab" typeface="Amiri"/>
         <a:font script="Hebr" typeface="Times New Roman"/>
         <a:font script="Thai" typeface="Angsana New"/>
         <a:font script="Ethi" typeface="Nyala"/>
@@ -58166,13 +58374,9 @@
       </a:majorFont>
       <a:minorFont>
         <a:latin typeface="Calibri" panose="020F0502020204030204"/>
-        <a:ea typeface=""/>
-        <a:cs typeface=""/>
-        <a:font script="Jpan" typeface="游ゴシック"/>
-        <a:font script="Hang" typeface="맑은 고딕"/>
-        <a:font script="Hans" typeface="等线"/>
-        <a:font script="Hant" typeface="新細明體"/>
-        <a:font script="Arab" typeface="Arial"/>
+        <a:ea typeface="Amiri" pitchFamily="2" charset="-78"/>
+        <a:cs typeface="Amiri" pitchFamily="2" charset="-78"/>
+        <a:font script="Arab" typeface="Amiri"/>
         <a:font script="Hebr" typeface="Arial"/>
         <a:font script="Thai" typeface="Cordia New"/>
         <a:font script="Ethi" typeface="Nyala"/>
